--- a/PRESENTATION.pptx
+++ b/PRESENTATION.pptx
@@ -1603,7 +1603,7 @@
           <a:p>
             <a:r>
               <a:rPr sz="1100"/>
-              <a:t>Show this last in the ingress part of the talk. It is what many teams have had in production for years, and it remains a valid pattern. The point is not that Ingress is broken; it is that Gateway API better matches modern platform requirements: clearer ownership, fewer controller-specific annotations, and more portable routing semantics.</a:t>
+              <a:t>Show this last in the ingress part of the talk. It is what many teams have had in production for years, and the `Ingress` API itself remains a valid Kubernetes API. The correction is that the community `kubernetes/ingress-nginx` controller is the piece being retired, so new designs should avoid depending on it. Gateway API better matches modern platform requirements: clearer ownership, fewer controller-specific annotations, and more portable routing semantics.</a:t>
             </a:r>
           </a:p>
         </p:txBody>
@@ -3168,7 +3168,7 @@
           <a:p>
             <a:r>
               <a:rPr sz="1100"/>
-              <a:t>Gateway API is to Ingress what `Deployment` was to `ReplicationController`: same intent, much better data model and extension points. The key word is *role-oriented*: a platform team owns the `Gateway`, dev teams own `HTTPRoute`s and attach to it via `parentRefs`. That alone removes 80% of the annotation collisions we used to have.</a:t>
+              <a:t>Be precise here: the Kubernetes `Ingress` API is stable and existing workloads can keep using it. The retirement concern is specifically the community `kubernetes/ingress-nginx` controller implementation, not the core API. Gateway API is to Ingress what `Deployment` was to `ReplicationController`: same intent, much better data model and extension points. The key word is *role-oriented*: a platform team owns the `Gateway`, dev teams own `HTTPRoute`s and attach to it via `parentRefs`. That alone removes 80% of the annotation collisions we used to have.</a:t>
             </a:r>
           </a:p>
         </p:txBody>
@@ -8009,7 +8009,7 @@
                 </a:solidFill>
                 <a:latin typeface="Calibri"/>
               </a:rPr>
-              <a:t>Why Ingress is no longer enough</a:t>
+              <a:t>Why Ingress alone is no longer enough</a:t>
             </a:r>
           </a:p>
         </p:txBody>
@@ -8023,7 +8023,7 @@
         <p:spPr>
           <a:xfrm>
             <a:off x="457200" y="1097280"/>
-            <a:ext cx="11277295" cy="1299459"/>
+            <a:ext cx="11277295" cy="1050540"/>
           </a:xfrm>
           <a:prstGeom prst="rect">
             <a:avLst/>
@@ -8048,7 +8048,7 @@
                 </a:solidFill>
                 <a:latin typeface="Calibri"/>
               </a:rPr>
-              <a:t>Limitations of `Ingress`</a:t>
+              <a:t>Important distinction</a:t>
             </a:r>
           </a:p>
           <a:p>
@@ -8073,7 +8073,25 @@
                 </a:solidFill>
                 <a:latin typeface="Calibri"/>
               </a:rPr>
-              <a:t>Annotation soup: every controller invented its own annotations → not portable</a:t>
+              <a:t>Kubernetes </a:t>
+            </a:r>
+            <a:r>
+              <a:rPr sz="1400" b="0">
+                <a:solidFill>
+                  <a:srgbClr val="B01060"/>
+                </a:solidFill>
+                <a:latin typeface="Consolas"/>
+              </a:rPr>
+              <a:t>Ingress</a:t>
+            </a:r>
+            <a:r>
+              <a:rPr sz="1400" b="0" i="0">
+                <a:solidFill>
+                  <a:srgbClr val="1F2A44"/>
+                </a:solidFill>
+                <a:latin typeface="Calibri"/>
+              </a:rPr>
+              <a:t> API is stable, not deprecated</a:t>
             </a:r>
           </a:p>
           <a:p>
@@ -8098,7 +8116,25 @@
                 </a:solidFill>
                 <a:latin typeface="Calibri"/>
               </a:rPr>
-              <a:t>Single role: cluster admin and app dev edit the same object</a:t>
+              <a:t>The community </a:t>
+            </a:r>
+            <a:r>
+              <a:rPr sz="1400" b="0">
+                <a:solidFill>
+                  <a:srgbClr val="B01060"/>
+                </a:solidFill>
+                <a:latin typeface="Consolas"/>
+              </a:rPr>
+              <a:t>kubernetes/ingress-nginx</a:t>
+            </a:r>
+            <a:r>
+              <a:rPr sz="1400" b="0" i="0">
+                <a:solidFill>
+                  <a:srgbClr val="1F2A44"/>
+                </a:solidFill>
+                <a:latin typeface="Calibri"/>
+              </a:rPr>
+              <a:t> controller is the retired/EOL component</a:t>
             </a:r>
           </a:p>
           <a:p>
@@ -8123,9 +8159,32 @@
                 </a:solidFill>
                 <a:latin typeface="Calibri"/>
               </a:rPr>
-              <a:t>No first-class TCP/UDP, gRPC, traffic splitting, header-based routing</a:t>
-            </a:r>
-          </a:p>
+              <a:t>Gateway API is the recommended direction for new, richer traffic-management designs</a:t>
+            </a:r>
+          </a:p>
+        </p:txBody>
+      </p:sp>
+      <p:sp>
+        <p:nvSpPr>
+          <p:cNvPr id="8" name="TextBox 7"/>
+          <p:cNvSpPr txBox="1"/>
+          <p:nvPr/>
+        </p:nvSpPr>
+        <p:spPr>
+          <a:xfrm>
+            <a:off x="457200" y="2202684"/>
+            <a:ext cx="11277295" cy="1299459"/>
+          </a:xfrm>
+          <a:prstGeom prst="rect">
+            <a:avLst/>
+          </a:prstGeom>
+          <a:noFill/>
+        </p:spPr>
+        <p:txBody>
+          <a:bodyPr wrap="square" lIns="45720" rIns="45720" tIns="18288" bIns="18288">
+            <a:spAutoFit/>
+          </a:bodyPr>
+          <a:lstStyle/>
           <a:p>
             <a:pPr>
               <a:spcAft>
@@ -8133,47 +8192,15 @@
               </a:spcAft>
             </a:pPr>
             <a:r>
-              <a:rPr sz="1400" b="1">
-                <a:solidFill>
-                  <a:srgbClr val="0078D4"/>
-                </a:solidFill>
-                <a:latin typeface="Calibri"/>
-              </a:rPr>
-              <a:t>▸ </a:t>
-            </a:r>
-            <a:r>
-              <a:rPr sz="1400" b="0" i="0">
+              <a:rPr sz="1400" b="1" i="0">
                 <a:solidFill>
                   <a:srgbClr val="1F2A44"/>
                 </a:solidFill>
                 <a:latin typeface="Calibri"/>
               </a:rPr>
-              <a:t>Extension story = vendor lock-in</a:t>
-            </a:r>
-          </a:p>
-        </p:txBody>
-      </p:sp>
-      <p:sp>
-        <p:nvSpPr>
-          <p:cNvPr id="8" name="TextBox 7"/>
-          <p:cNvSpPr txBox="1"/>
-          <p:nvPr/>
-        </p:nvSpPr>
-        <p:spPr>
-          <a:xfrm>
-            <a:off x="457200" y="2451603"/>
-            <a:ext cx="11277295" cy="303783"/>
-          </a:xfrm>
-          <a:prstGeom prst="rect">
-            <a:avLst/>
-          </a:prstGeom>
-          <a:noFill/>
-        </p:spPr>
-        <p:txBody>
-          <a:bodyPr wrap="square" lIns="45720" rIns="45720" tIns="18288" bIns="18288">
-            <a:spAutoFit/>
-          </a:bodyPr>
-          <a:lstStyle/>
+              <a:t>Limitations of `Ingress` as an API model</a:t>
+            </a:r>
+          </a:p>
           <a:p>
             <a:pPr>
               <a:spcAft>
@@ -8181,6 +8208,129 @@
               </a:spcAft>
             </a:pPr>
             <a:r>
+              <a:rPr sz="1400" b="1">
+                <a:solidFill>
+                  <a:srgbClr val="0078D4"/>
+                </a:solidFill>
+                <a:latin typeface="Calibri"/>
+              </a:rPr>
+              <a:t>▸ </a:t>
+            </a:r>
+            <a:r>
+              <a:rPr sz="1400" b="0" i="0">
+                <a:solidFill>
+                  <a:srgbClr val="1F2A44"/>
+                </a:solidFill>
+                <a:latin typeface="Calibri"/>
+              </a:rPr>
+              <a:t>Annotation soup: every controller invented its own annotations → not portable</a:t>
+            </a:r>
+          </a:p>
+          <a:p>
+            <a:pPr>
+              <a:spcAft>
+                <a:spcPts val="200"/>
+              </a:spcAft>
+            </a:pPr>
+            <a:r>
+              <a:rPr sz="1400" b="1">
+                <a:solidFill>
+                  <a:srgbClr val="0078D4"/>
+                </a:solidFill>
+                <a:latin typeface="Calibri"/>
+              </a:rPr>
+              <a:t>▸ </a:t>
+            </a:r>
+            <a:r>
+              <a:rPr sz="1400" b="0" i="0">
+                <a:solidFill>
+                  <a:srgbClr val="1F2A44"/>
+                </a:solidFill>
+                <a:latin typeface="Calibri"/>
+              </a:rPr>
+              <a:t>Single role: cluster admin and app dev edit the same object</a:t>
+            </a:r>
+          </a:p>
+          <a:p>
+            <a:pPr>
+              <a:spcAft>
+                <a:spcPts val="200"/>
+              </a:spcAft>
+            </a:pPr>
+            <a:r>
+              <a:rPr sz="1400" b="1">
+                <a:solidFill>
+                  <a:srgbClr val="0078D4"/>
+                </a:solidFill>
+                <a:latin typeface="Calibri"/>
+              </a:rPr>
+              <a:t>▸ </a:t>
+            </a:r>
+            <a:r>
+              <a:rPr sz="1400" b="0" i="0">
+                <a:solidFill>
+                  <a:srgbClr val="1F2A44"/>
+                </a:solidFill>
+                <a:latin typeface="Calibri"/>
+              </a:rPr>
+              <a:t>No first-class TCP/UDP, gRPC, traffic splitting, header-based routing</a:t>
+            </a:r>
+          </a:p>
+          <a:p>
+            <a:pPr>
+              <a:spcAft>
+                <a:spcPts val="200"/>
+              </a:spcAft>
+            </a:pPr>
+            <a:r>
+              <a:rPr sz="1400" b="1">
+                <a:solidFill>
+                  <a:srgbClr val="0078D4"/>
+                </a:solidFill>
+                <a:latin typeface="Calibri"/>
+              </a:rPr>
+              <a:t>▸ </a:t>
+            </a:r>
+            <a:r>
+              <a:rPr sz="1400" b="0" i="0">
+                <a:solidFill>
+                  <a:srgbClr val="1F2A44"/>
+                </a:solidFill>
+                <a:latin typeface="Calibri"/>
+              </a:rPr>
+              <a:t>Extension story = vendor lock-in</a:t>
+            </a:r>
+          </a:p>
+        </p:txBody>
+      </p:sp>
+      <p:sp>
+        <p:nvSpPr>
+          <p:cNvPr id="9" name="TextBox 8"/>
+          <p:cNvSpPr txBox="1"/>
+          <p:nvPr/>
+        </p:nvSpPr>
+        <p:spPr>
+          <a:xfrm>
+            <a:off x="457200" y="3557007"/>
+            <a:ext cx="11277295" cy="303783"/>
+          </a:xfrm>
+          <a:prstGeom prst="rect">
+            <a:avLst/>
+          </a:prstGeom>
+          <a:noFill/>
+        </p:spPr>
+        <p:txBody>
+          <a:bodyPr wrap="square" lIns="45720" rIns="45720" tIns="18288" bIns="18288">
+            <a:spAutoFit/>
+          </a:bodyPr>
+          <a:lstStyle/>
+          <a:p>
+            <a:pPr>
+              <a:spcAft>
+                <a:spcPts val="200"/>
+              </a:spcAft>
+            </a:pPr>
+            <a:r>
               <a:rPr sz="1400" b="1" i="0">
                 <a:solidFill>
                   <a:srgbClr val="1F2A44"/>
@@ -8194,14 +8344,14 @@
       </p:sp>
       <p:graphicFrame>
         <p:nvGraphicFramePr>
-          <p:cNvPr id="9" name="Table 8"/>
+          <p:cNvPr id="10" name="Table 9"/>
           <p:cNvGraphicFramePr>
             <a:graphicFrameLocks noGrp="1"/>
           </p:cNvGraphicFramePr>
           <p:nvPr/>
         </p:nvGraphicFramePr>
         <p:xfrm>
-          <a:off x="457200" y="2810250"/>
+          <a:off x="457200" y="3915654"/>
           <a:ext cx="11277294" cy="1581912"/>
         </p:xfrm>
         <a:graphic>
@@ -8529,13 +8679,13 @@
       </p:graphicFrame>
       <p:sp>
         <p:nvSpPr>
-          <p:cNvPr id="10" name="TextBox 9"/>
+          <p:cNvPr id="11" name="TextBox 10"/>
           <p:cNvSpPr txBox="1"/>
           <p:nvPr/>
         </p:nvSpPr>
         <p:spPr>
           <a:xfrm>
-            <a:off x="457200" y="4529322"/>
+            <a:off x="457200" y="5634726"/>
             <a:ext cx="11277295" cy="552702"/>
           </a:xfrm>
           <a:prstGeom prst="rect">
@@ -8620,7 +8770,7 @@
       </p:sp>
       <p:sp>
         <p:nvSpPr>
-          <p:cNvPr id="11" name="Rectangle 10"/>
+          <p:cNvPr id="12" name="Rectangle 11"/>
           <p:cNvSpPr/>
           <p:nvPr/>
         </p:nvSpPr>
@@ -8664,7 +8814,7 @@
       </p:sp>
       <p:sp>
         <p:nvSpPr>
-          <p:cNvPr id="12" name="TextBox 11"/>
+          <p:cNvPr id="13" name="TextBox 12"/>
           <p:cNvSpPr txBox="1"/>
           <p:nvPr/>
         </p:nvSpPr>
@@ -8699,7 +8849,7 @@
       </p:sp>
       <p:sp>
         <p:nvSpPr>
-          <p:cNvPr id="13" name="TextBox 12"/>
+          <p:cNvPr id="14" name="TextBox 13"/>
           <p:cNvSpPr txBox="1"/>
           <p:nvPr/>
         </p:nvSpPr>
@@ -13983,7 +14133,7 @@
                 </a:solidFill>
                 <a:latin typeface="Calibri"/>
               </a:rPr>
-              <a:t>Legacy reference: NGINX Ingress on AKS</a:t>
+              <a:t>Legacy reference: community ingress-nginx on AKS</a:t>
             </a:r>
           </a:p>
         </p:txBody>
@@ -14304,7 +14454,7 @@
                 </a:solidFill>
                 <a:latin typeface="Calibri"/>
               </a:rPr>
-              <a:t>Single resource (</a:t>
+              <a:t>Kubernetes </a:t>
             </a:r>
             <a:r>
               <a:rPr sz="1400" b="0">
@@ -14322,7 +14472,7 @@
                 </a:solidFill>
                 <a:latin typeface="Calibri"/>
               </a:rPr>
-              <a:t>) with vendor-specific annotations</a:t>
+              <a:t> API: stable, still valid</a:t>
             </a:r>
           </a:p>
           <a:p>
@@ -14347,7 +14497,25 @@
                 </a:solidFill>
                 <a:latin typeface="Calibri"/>
               </a:rPr>
-              <a:t>Extra in-cluster hop (NGINX pod), and another via kube-proxy</a:t>
+              <a:t>Community </a:t>
+            </a:r>
+            <a:r>
+              <a:rPr sz="1400" b="0">
+                <a:solidFill>
+                  <a:srgbClr val="B01060"/>
+                </a:solidFill>
+                <a:latin typeface="Consolas"/>
+              </a:rPr>
+              <a:t>kubernetes/ingress-nginx</a:t>
+            </a:r>
+            <a:r>
+              <a:rPr sz="1400" b="0" i="0">
+                <a:solidFill>
+                  <a:srgbClr val="1F2A44"/>
+                </a:solidFill>
+                <a:latin typeface="Calibri"/>
+              </a:rPr>
+              <a:t> controller: retired/EOL implementation</a:t>
             </a:r>
           </a:p>
           <a:p>
@@ -14372,7 +14540,25 @@
                 </a:solidFill>
                 <a:latin typeface="Calibri"/>
               </a:rPr>
-              <a:t>Still works and Kubernetes Ingress is stable, but the model is limited</a:t>
+              <a:t>Single resource (</a:t>
+            </a:r>
+            <a:r>
+              <a:rPr sz="1400" b="0">
+                <a:solidFill>
+                  <a:srgbClr val="B01060"/>
+                </a:solidFill>
+                <a:latin typeface="Consolas"/>
+              </a:rPr>
+              <a:t>Ingress</a:t>
+            </a:r>
+            <a:r>
+              <a:rPr sz="1400" b="0" i="0">
+                <a:solidFill>
+                  <a:srgbClr val="1F2A44"/>
+                </a:solidFill>
+                <a:latin typeface="Calibri"/>
+              </a:rPr>
+              <a:t>) with controller-specific annotations</a:t>
             </a:r>
           </a:p>
           <a:p>
@@ -17910,7 +18096,7 @@
                 </a:solidFill>
                 <a:latin typeface="Calibri"/>
               </a:rPr>
-              <a:t>Legacy: NGINX Ingress on AKS (traditional reference)</a:t>
+              <a:t>Legacy: community ingress-nginx on AKS (retirement reference)</a:t>
             </a:r>
           </a:p>
         </p:txBody>
@@ -30415,7 +30601,7 @@
                 </a:solidFill>
                 <a:latin typeface="Calibri"/>
               </a:rPr>
-              <a:t>Why Ingress is no longer enough</a:t>
+              <a:t>Why Ingress alone is no longer enough</a:t>
             </a:r>
           </a:p>
         </p:txBody>
@@ -30805,7 +30991,7 @@
                 </a:solidFill>
                 <a:latin typeface="Calibri"/>
               </a:rPr>
-              <a:t>Legacy reference: NGINX Ingress on AKS</a:t>
+              <a:t>Legacy reference: community ingress-nginx on AKS</a:t>
             </a:r>
           </a:p>
         </p:txBody>

--- a/PRESENTATION.pptx
+++ b/PRESENTATION.pptx
@@ -1130,6 +1130,12 @@
           <a:p>
             <a:r>
               <a:rPr sz="1100"/>
+              <a:t># Pinned demo Kubernetes version for reproducibility</a:t>
+            </a:r>
+          </a:p>
+          <a:p>
+            <a:r>
+              <a:rPr sz="1100"/>
               <a:t>az aks create -g $RG -n $AKS -l $LOC \</a:t>
             </a:r>
           </a:p>
@@ -2006,6 +2012,12 @@
           <a:p>
             <a:r>
               <a:rPr sz="1100"/>
+              <a:t># Pinned demo Kubernetes version for reproducibility</a:t>
+            </a:r>
+          </a:p>
+          <a:p>
+            <a:r>
+              <a:rPr sz="1100"/>
               <a:t>az aks create -g $RG -n $AKS -l $LOC \</a:t>
             </a:r>
           </a:p>
@@ -2762,7 +2774,7 @@
           <a:p>
             <a:r>
               <a:rPr sz="1100"/>
-              <a:t># 1. Create resource group + AKS (Free tier, K8s 1.34.7, Sweden Central)</a:t>
+              <a:t># 1. Create resource group + AKS (Free tier, pinned K8s 1.34.7, Sweden Central)</a:t>
             </a:r>
           </a:p>
           <a:p>
@@ -21304,7 +21316,7 @@
                 </a:solidFill>
                 <a:latin typeface="Calibri"/>
               </a:rPr>
-              <a:t>Ensure the K8s-configuration provider + extension CLI are available</a:t>
+              <a:t>Pinned demo Kubernetes version for reproducibility</a:t>
             </a:r>
           </a:p>
         </p:txBody>
@@ -21417,7 +21429,7 @@
                 </a:solidFill>
                 <a:latin typeface="Calibri"/>
               </a:rPr>
-              <a:t>Install the managed Argo CD extension on the cluster</a:t>
+              <a:t>Ensure the K8s-configuration provider + extension CLI are available</a:t>
             </a:r>
           </a:p>
         </p:txBody>
@@ -21530,6 +21542,119 @@
                 </a:solidFill>
                 <a:latin typeface="Calibri"/>
               </a:rPr>
+              <a:t>Install the managed Argo CD extension on the cluster</a:t>
+            </a:r>
+          </a:p>
+        </p:txBody>
+      </p:sp>
+      <p:sp>
+        <p:nvSpPr>
+          <p:cNvPr id="18" name="Oval 17"/>
+          <p:cNvSpPr/>
+          <p:nvPr/>
+        </p:nvSpPr>
+        <p:spPr>
+          <a:xfrm>
+            <a:off x="457200" y="3520440"/>
+            <a:ext cx="384048" cy="384048"/>
+          </a:xfrm>
+          <a:prstGeom prst="ellipse">
+            <a:avLst/>
+          </a:prstGeom>
+          <a:solidFill>
+            <a:srgbClr val="103A6E"/>
+          </a:solidFill>
+          <a:ln>
+            <a:noFill/>
+          </a:ln>
+        </p:spPr>
+        <p:style>
+          <a:lnRef idx="1">
+            <a:schemeClr val="accent1"/>
+          </a:lnRef>
+          <a:fillRef idx="3">
+            <a:schemeClr val="accent1"/>
+          </a:fillRef>
+          <a:effectRef idx="2">
+            <a:schemeClr val="accent1"/>
+          </a:effectRef>
+          <a:fontRef idx="minor">
+            <a:schemeClr val="lt1"/>
+          </a:fontRef>
+        </p:style>
+        <p:txBody>
+          <a:bodyPr rtlCol="0" anchor="ctr"/>
+          <a:lstStyle/>
+          <a:p>
+            <a:pPr algn="ctr"/>
+          </a:p>
+        </p:txBody>
+      </p:sp>
+      <p:sp>
+        <p:nvSpPr>
+          <p:cNvPr id="19" name="TextBox 18"/>
+          <p:cNvSpPr txBox="1"/>
+          <p:nvPr/>
+        </p:nvSpPr>
+        <p:spPr>
+          <a:xfrm>
+            <a:off x="457200" y="3520440"/>
+            <a:ext cx="384048" cy="384048"/>
+          </a:xfrm>
+          <a:prstGeom prst="rect">
+            <a:avLst/>
+          </a:prstGeom>
+          <a:noFill/>
+        </p:spPr>
+        <p:txBody>
+          <a:bodyPr wrap="square" lIns="45720" rIns="45720" tIns="18288" bIns="18288" anchor="ctr">
+            <a:spAutoFit/>
+          </a:bodyPr>
+          <a:lstStyle/>
+          <a:p>
+            <a:pPr algn="ctr"/>
+            <a:r>
+              <a:rPr sz="1400" b="1" i="0">
+                <a:solidFill>
+                  <a:srgbClr val="FFFFFF"/>
+                </a:solidFill>
+                <a:latin typeface="Calibri"/>
+              </a:rPr>
+              <a:t>4</a:t>
+            </a:r>
+          </a:p>
+        </p:txBody>
+      </p:sp>
+      <p:sp>
+        <p:nvSpPr>
+          <p:cNvPr id="20" name="TextBox 19"/>
+          <p:cNvSpPr txBox="1"/>
+          <p:nvPr/>
+        </p:nvSpPr>
+        <p:spPr>
+          <a:xfrm>
+            <a:off x="960120" y="3538728"/>
+            <a:ext cx="6309360" cy="411480"/>
+          </a:xfrm>
+          <a:prstGeom prst="rect">
+            <a:avLst/>
+          </a:prstGeom>
+          <a:noFill/>
+        </p:spPr>
+        <p:txBody>
+          <a:bodyPr wrap="square" lIns="45720" rIns="45720" tIns="18288" bIns="18288" anchor="ctr">
+            <a:spAutoFit/>
+          </a:bodyPr>
+          <a:lstStyle/>
+          <a:p>
+            <a:pPr algn="l"/>
+            <a:r>
+              <a:rPr sz="1300" b="0" i="0">
+                <a:solidFill>
+                  <a:srgbClr val="1F2A44"/>
+                </a:solidFill>
+                <a:latin typeface="Calibri"/>
+              </a:rPr>
               <a:t>Bootstrap an Application from Git</a:t>
             </a:r>
           </a:p>
@@ -21537,7 +21662,7 @@
       </p:sp>
       <p:sp>
         <p:nvSpPr>
-          <p:cNvPr id="18" name="Rounded Rectangle 17"/>
+          <p:cNvPr id="21" name="Rounded Rectangle 20"/>
           <p:cNvSpPr/>
           <p:nvPr/>
         </p:nvSpPr>
@@ -21583,7 +21708,7 @@
       </p:sp>
       <p:sp>
         <p:nvSpPr>
-          <p:cNvPr id="19" name="Rectangle 18"/>
+          <p:cNvPr id="22" name="Rectangle 21"/>
           <p:cNvSpPr/>
           <p:nvPr/>
         </p:nvSpPr>
@@ -21627,7 +21752,7 @@
       </p:sp>
       <p:sp>
         <p:nvSpPr>
-          <p:cNvPr id="20" name="TextBox 19"/>
+          <p:cNvPr id="23" name="TextBox 22"/>
           <p:cNvSpPr txBox="1"/>
           <p:nvPr/>
         </p:nvSpPr>
@@ -21662,7 +21787,7 @@
       </p:sp>
       <p:sp>
         <p:nvSpPr>
-          <p:cNvPr id="21" name="Oval 20"/>
+          <p:cNvPr id="24" name="Oval 23"/>
           <p:cNvSpPr/>
           <p:nvPr/>
         </p:nvSpPr>
@@ -21705,7 +21830,7 @@
       </p:sp>
       <p:sp>
         <p:nvSpPr>
-          <p:cNvPr id="22" name="TextBox 21"/>
+          <p:cNvPr id="25" name="TextBox 24"/>
           <p:cNvSpPr txBox="1"/>
           <p:nvPr/>
         </p:nvSpPr>
@@ -21740,7 +21865,7 @@
       </p:sp>
       <p:sp>
         <p:nvSpPr>
-          <p:cNvPr id="23" name="Oval 22"/>
+          <p:cNvPr id="26" name="Oval 25"/>
           <p:cNvSpPr/>
           <p:nvPr/>
         </p:nvSpPr>
@@ -21783,7 +21908,7 @@
       </p:sp>
       <p:sp>
         <p:nvSpPr>
-          <p:cNvPr id="24" name="TextBox 23"/>
+          <p:cNvPr id="27" name="TextBox 26"/>
           <p:cNvSpPr txBox="1"/>
           <p:nvPr/>
         </p:nvSpPr>
@@ -21818,7 +21943,7 @@
       </p:sp>
       <p:sp>
         <p:nvSpPr>
-          <p:cNvPr id="25" name="Oval 24"/>
+          <p:cNvPr id="28" name="Oval 27"/>
           <p:cNvSpPr/>
           <p:nvPr/>
         </p:nvSpPr>
@@ -21861,7 +21986,7 @@
       </p:sp>
       <p:sp>
         <p:nvSpPr>
-          <p:cNvPr id="26" name="TextBox 25"/>
+          <p:cNvPr id="29" name="TextBox 28"/>
           <p:cNvSpPr txBox="1"/>
           <p:nvPr/>
         </p:nvSpPr>
@@ -21896,7 +22021,7 @@
       </p:sp>
       <p:sp>
         <p:nvSpPr>
-          <p:cNvPr id="27" name="Oval 26"/>
+          <p:cNvPr id="30" name="Oval 29"/>
           <p:cNvSpPr/>
           <p:nvPr/>
         </p:nvSpPr>
@@ -21939,7 +22064,7 @@
       </p:sp>
       <p:sp>
         <p:nvSpPr>
-          <p:cNvPr id="28" name="TextBox 27"/>
+          <p:cNvPr id="31" name="TextBox 30"/>
           <p:cNvSpPr txBox="1"/>
           <p:nvPr/>
         </p:nvSpPr>
@@ -21974,7 +22099,7 @@
       </p:sp>
       <p:sp>
         <p:nvSpPr>
-          <p:cNvPr id="29" name="Rounded Rectangle 28"/>
+          <p:cNvPr id="32" name="Rounded Rectangle 31"/>
           <p:cNvSpPr/>
           <p:nvPr/>
         </p:nvSpPr>
@@ -22022,7 +22147,7 @@
       </p:sp>
       <p:sp>
         <p:nvSpPr>
-          <p:cNvPr id="30" name="TextBox 29"/>
+          <p:cNvPr id="33" name="TextBox 32"/>
           <p:cNvSpPr txBox="1"/>
           <p:nvPr/>
         </p:nvSpPr>
@@ -22057,7 +22182,7 @@
       </p:sp>
       <p:sp>
         <p:nvSpPr>
-          <p:cNvPr id="31" name="TextBox 30"/>
+          <p:cNvPr id="34" name="TextBox 33"/>
           <p:cNvSpPr txBox="1"/>
           <p:nvPr/>
         </p:nvSpPr>
@@ -22140,7 +22265,7 @@
       </p:sp>
       <p:sp>
         <p:nvSpPr>
-          <p:cNvPr id="32" name="Rectangle 31"/>
+          <p:cNvPr id="35" name="Rectangle 34"/>
           <p:cNvSpPr/>
           <p:nvPr/>
         </p:nvSpPr>
@@ -22184,7 +22309,7 @@
       </p:sp>
       <p:sp>
         <p:nvSpPr>
-          <p:cNvPr id="33" name="TextBox 32"/>
+          <p:cNvPr id="36" name="TextBox 35"/>
           <p:cNvSpPr txBox="1"/>
           <p:nvPr/>
         </p:nvSpPr>
@@ -22219,7 +22344,7 @@
       </p:sp>
       <p:sp>
         <p:nvSpPr>
-          <p:cNvPr id="34" name="Rounded Rectangle 33"/>
+          <p:cNvPr id="37" name="Rounded Rectangle 36"/>
           <p:cNvSpPr/>
           <p:nvPr/>
         </p:nvSpPr>
@@ -22265,7 +22390,7 @@
       </p:sp>
       <p:sp>
         <p:nvSpPr>
-          <p:cNvPr id="35" name="TextBox 34"/>
+          <p:cNvPr id="38" name="TextBox 37"/>
           <p:cNvSpPr txBox="1"/>
           <p:nvPr/>
         </p:nvSpPr>
@@ -22300,7 +22425,7 @@
       </p:sp>
       <p:sp>
         <p:nvSpPr>
-          <p:cNvPr id="36" name="TextBox 35"/>
+          <p:cNvPr id="39" name="TextBox 38"/>
           <p:cNvSpPr txBox="1"/>
           <p:nvPr/>
         </p:nvSpPr>
@@ -28905,7 +29030,7 @@
                 </a:solidFill>
                 <a:latin typeface="Calibri"/>
               </a:rPr>
-              <a:t>Create resource group + AKS (Free tier, K8s 1.34.7, Sweden Central)</a:t>
+              <a:t>Create resource group + AKS (Free tier, pinned K8s 1.34.7, Sweden Central)</a:t>
             </a:r>
           </a:p>
         </p:txBody>
@@ -29560,7 +29685,7 @@
                 </a:solidFill>
                 <a:latin typeface="Calibri"/>
               </a:rPr>
-              <a:t>AKS 1.34.7 with Cilium dataplane in Sweden Central</a:t>
+              <a:t>Pinned AKS 1.34.7 with Cilium dataplane in Sweden Central</a:t>
             </a:r>
           </a:p>
         </p:txBody>

--- a/PRESENTATION.pptx
+++ b/PRESENTATION.pptx
@@ -628,7 +628,7 @@
           <a:p>
             <a:r>
               <a:rPr sz="1100"/>
-              <a:t>Envoy Gateway is the upstream-reference implementation. The current demo installs the stable upstream release from its published `install.yaml`, verifies `GatewayClass/envoy-gateway`, then applies the application `Gateway` and `HTTPRoute` in the default namespace. On AKS, Envoy's Service of type LoadBalancer triggers an Azure SLB and public IP — same north-south model you already use, but routing is portable Gateway API YAML rather than controller-specific annotations. The repository deployment flow is split into infra, image build, and Kubernetes configuration phases so only the final phase touches the active `kubectl` context.</a:t>
+              <a:t>Envoy Gateway is the upstream-reference implementation. The current demo script applies the stable upstream v1.2.3 `install.yaml`, verifies `GatewayClass/envoy-gateway`, then applies the application `Gateway` and `HTTPRoute` in the default namespace. On AKS, Envoy's Service of type LoadBalancer triggers an Azure SLB and public IP — same north-south model you already use, but routing is portable Gateway API YAML rather than controller-specific annotations. The repository deployment flow is split into infra, image build, and Kubernetes configuration phases so only the final phase touches the active `kubectl` context.</a:t>
             </a:r>
           </a:p>
           <a:p>
@@ -1494,7 +1494,7 @@
           <a:p>
             <a:r>
               <a:rPr sz="1100"/>
-              <a:t>This is the slide to land the point of part 2 + part 3: Gateway API is the *contract*, AGC is the *Azure-native implementation*. The demo keeps the `Gateway`, `HTTPRoute`, service, and deployment in `default` for readability, while the AGC infrastructure object lives in `alb-infra` and the controller lives in `azure-alb-system`. In production you can split the Gateway and routes across platform/app namespaces; the API shape still lets teams write portable routing YAML while the platform team chooses Envoy in dev or AGC in production.</a:t>
+              <a:t>This is the slide to land the point of the Envoy Gateway and AGC demos: Gateway API is the *contract*, AGC is the *Azure-native implementation*. The demo keeps the `Gateway`, `HTTPRoute`, service, and deployment in `default` for readability, while the AGC infrastructure object lives in `alb-infra` and the controller lives in `azure-alb-system`. In production you can split the Gateway and routes across platform/app namespaces; the API shape still lets teams write portable routing YAML while the platform team chooses Envoy in dev or AGC in production.</a:t>
             </a:r>
           </a:p>
         </p:txBody>

--- a/PRESENTATION.pptx
+++ b/PRESENTATION.pptx
@@ -628,7 +628,7 @@
           <a:p>
             <a:r>
               <a:rPr sz="1100"/>
-              <a:t>Envoy Gateway is the upstream-reference implementation. The current demo script applies the stable upstream v1.2.3 `install.yaml`, verifies `GatewayClass/envoy-gateway`, then applies the application `Gateway` and `HTTPRoute` in the default namespace. On AKS, Envoy's Service of type LoadBalancer triggers an Azure SLB and public IP — same north-south model you already use, but routing is portable Gateway API YAML rather than controller-specific annotations. The repository deployment flow is split into infra, image build, and Kubernetes configuration phases so only the final phase touches the active `kubectl` context.</a:t>
+              <a:t>Envoy Gateway is the upstream-reference implementation. The current demo script applies the stable upstream v1.2.3 `install.yaml`, verifies `GatewayClass/envoy-gateway`, then applies the application `Gateway` and `HTTPRoute` in the `demo` namespace. On AKS, Envoy's Service of type LoadBalancer triggers an Azure SLB and public IP — same north-south model you already use, but routing is portable Gateway API YAML rather than controller-specific annotations. The repository deployment flow is split into infra, image build, and Kubernetes configuration phases so only the final phase touches the active `kubectl` context.</a:t>
             </a:r>
           </a:p>
           <a:p>
@@ -748,7 +748,7 @@
           <a:p>
             <a:r>
               <a:rPr sz="1100"/>
-              <a:t>metadata: { name: envoy-demo-gateway, namespace: default }</a:t>
+              <a:t>metadata: { name: envoy-demo-gateway, namespace: demo }</a:t>
             </a:r>
           </a:p>
           <a:p>
@@ -820,7 +820,7 @@
           <a:p>
             <a:r>
               <a:rPr sz="1100"/>
-              <a:t>metadata: { name: envoy-demo-route, namespace: default }</a:t>
+              <a:t>metadata: { name: envoy-demo-route, namespace: demo }</a:t>
             </a:r>
           </a:p>
           <a:p>
@@ -1250,7 +1250,7 @@
           <a:p>
             <a:r>
               <a:rPr sz="1100"/>
-              <a:t>  namespace: default</a:t>
+              <a:t>  namespace: demo</a:t>
             </a:r>
           </a:p>
           <a:p>
@@ -1316,7 +1316,7 @@
           <a:p>
             <a:r>
               <a:rPr sz="1100"/>
-              <a:t>metadata: { name: agc-demo-route, namespace: default }</a:t>
+              <a:t>metadata: { name: agc-demo-route, namespace: demo }</a:t>
             </a:r>
           </a:p>
           <a:p>
@@ -15451,7 +15451,7 @@
                 </a:solidFill>
                 <a:latin typeface="Consolas"/>
               </a:rPr>
-              <a:t>    ┌─ Application namespace: default ─────────────────────────────┐</a:t>
+              <a:t>    ┌─ Application namespace: demo ────────────────────────────────┐</a:t>
             </a:r>
           </a:p>
           <a:p>
